--- a/thesis/Antibiogram_Defense_Haddadha.pptx
+++ b/thesis/Antibiogram_Defense_Haddadha.pptx
@@ -1265,7 +1265,7 @@
               <a:rPr lang="fa-IR" dirty="0">
                 <a:cs typeface="IRNazanin"/>
               </a:rPr>
-              <a:t>این اسلاید تا پایان جلسه روی پرده می‌ماند. برای پرسش‌ها آماده باشید: چرا یادگیری ماشین نه، چرا فقط یازده عکس، و چرا خطای بسیار عمده بالاست. پاسخ هر سه در اسلایدهای ۵، ۱۳ و ۱۱ آمده است.</a:t>
+              <a:t>این اسلاید تا پایان جلسه روی پرده می‌ماند. برای پرسش‌ها آماده باشید: چرا بدون یادگیری ماشین، چرا فقط یازده عکس، و چرا خطای بسیار عمده بالاست. پاسخ هر سه در اسلایدهای ۵، ۱۳ و ۱۱ آمده است.</a:t>
             </a:r>
             <a:endParaRPr lang="en-US" dirty="0"/>
           </a:p>
@@ -2827,7 +2827,7 @@
                 <a:ea typeface="Cambria" pitchFamily="34" charset="-122"/>
                 <a:cs typeface="IRTitr" pitchFamily="34" charset="-120"/>
               </a:rPr>
-              <a:t>مبتنی بر پردازش تصویر و یادگیری ماشین مطابق استاندارد EUCAST</a:t>
+              <a:t>مبتنی بر پردازش تصویر مطابق استاندارد EUCAST</a:t>
             </a:r>
             <a:endParaRPr lang="en-US" sz="1600" dirty="0"/>
           </a:p>

--- a/thesis/Antibiogram_Defense_Haddadha.pptx
+++ b/thesis/Antibiogram_Defense_Haddadha.pptx
@@ -817,7 +817,7 @@
               <a:rPr lang="fa-IR" dirty="0">
                 <a:cs typeface="B Nazanin"/>
               </a:rPr>
-              <a:t>«۲۰ ثانیه» سلام و خوش‌آمد. عنوان، رشته و نام استاد راهنما را شمرده بگویید. عجله نکنید.</a:t>
+              <a:t>«۲۰ ثانیه» عرض سلام و خوش‌آمدگویی. عنوان، رشته و نام استاد راهنما با آهنگ شمرده بیان شود.</a:t>
             </a:r>
             <a:endParaRPr lang="en-US" dirty="0"/>
           </a:p>
@@ -908,7 +908,7 @@
               <a:rPr lang="fa-IR" dirty="0">
                 <a:cs typeface="B Nazanin"/>
               </a:rPr>
-              <a:t>«۱ دقیقه» بدون دفاع و بدون عذرخواهی. لحن خونسرد. این بخش اعتماد داور را می‌سازد.</a:t>
+              <a:t>«۱ دقیقه» بیان محدودیت‌ها با لحن خونسرد و بدون توجیه. این بخش اعتبار ارائه را تقویت می‌کند.</a:t>
             </a:r>
             <a:endParaRPr lang="en-US" dirty="0"/>
           </a:p>
@@ -999,7 +999,7 @@
               <a:rPr lang="fa-IR" dirty="0">
                 <a:cs typeface="B Nazanin"/>
               </a:rPr>
-              <a:t>«۱ دقیقه» سه دستاورد را بشمارید. روی سومی تاکید کنید، چون همان چیزی است که چکیده هم بر آن ایستاده. جمله جمع‌بندی پایین را کلمه به کلمه بخوانید.</a:t>
+              <a:t>«۱ دقیقه» سه دستاورد شمرده شود، با تأکید بر دستاورد سوم که مبنای چکیده نیز هست. جمله جمع‌بندی کلمه به کلمه قرائت گردد.</a:t>
             </a:r>
             <a:endParaRPr lang="en-US" dirty="0"/>
           </a:p>
@@ -1090,7 +1090,7 @@
               <a:rPr lang="fa-IR" dirty="0">
                 <a:cs typeface="B Nazanin"/>
               </a:rPr>
-              <a:t>«۱ دقیقه» تاکید کنید پیشنهاد کوتاه‌مدت از پیش سنجیده شده و عدد دارد. چهار شرط تصویربرداری را بگویید و اضافه کنید هیچ‌کدام تجهیزات گران نمی‌خواهند.</a:t>
+              <a:t>«۱ دقیقه» بر سنجیده بودن پیشنهاد کوتاه‌مدت و وجود عدد برای آن تأکید شود. چهار شرط تصویربرداری با ذکر کم‌هزینه بودن آن‌ها بیان گردد.</a:t>
             </a:r>
             <a:endParaRPr lang="en-US" dirty="0"/>
           </a:p>
@@ -1181,7 +1181,7 @@
               <a:rPr lang="fa-IR" dirty="0">
                 <a:cs typeface="B Nazanin"/>
               </a:rPr>
-              <a:t>«۲۰ ثانیه» کوتاه و صمیمانه. اسم‌ها را درست تلفظ کنید.</a:t>
+              <a:t>«۲۰ ثانیه» قرائت کوتاه و شمرده. تلفظ صحیح نام‌ها رعایت شود.</a:t>
             </a:r>
             <a:endParaRPr lang="en-US" dirty="0"/>
           </a:p>
@@ -1272,7 +1272,7 @@
               <a:rPr lang="fa-IR" dirty="0">
                 <a:cs typeface="B Nazanin"/>
               </a:rPr>
-              <a:t>تا پایان جلسه روی پرده می‌ماند. پرسش‌های محتمل و شماره اسلاید پاسخشان: چرا بدون یادگیری ماشین (۷ و ۱۸)؛ چرا فقط یازده عکس (۲۰)؛ چرا خطای بسیار عمده بالاست (۱۵ و ۱۶)؛ چرا مقیاس از قطر دیسک (۹ و ۲۲)؛ اگر مدل سیگموئید بهتر است چرا در نتایج نیست (۲۲).</a:t>
+              <a:t>این اسلاید تا پایان جلسه بر پرده باقی می‌ماند. پرسش‌های محتمل و شماره اسلاید پاسخ هر یک: دلیل نبود مدل یادگیرنده (۷ و ۱۸)؛ محدود بودن مجموعه به یازده تصویر (۲۰)؛ بالا بودن نرخ خطای بسیار عمده (۱۵ و ۱۶)؛ اتکای مقیاس به قطر دیسک (۹ و ۲۲)؛ جایگاه مدل سیگموئید در نتایج (۲۲).</a:t>
             </a:r>
             <a:endParaRPr lang="en-US" dirty="0"/>
           </a:p>
@@ -1363,7 +1363,7 @@
               <a:rPr lang="fa-IR" dirty="0">
                 <a:cs typeface="B Nazanin"/>
               </a:rPr>
-              <a:t>«۱ دقیقه» خبر خوب است، سریع بگویید. جمله احتیاط درباره یک آزمایشگاه بودن را حتماً بگویید؛ داور آن را می‌پرسد و بهتر است خودتان گفته باشید.</a:t>
+              <a:t>«۱ دقیقه» ارائه سریع این بخش. قید مربوط به تهیه تمام تصاویر از یک آزمایشگاه حتماً بیان شود.</a:t>
             </a:r>
             <a:endParaRPr lang="en-US" dirty="0"/>
           </a:p>
@@ -1454,7 +1454,7 @@
               <a:rPr lang="fa-IR" dirty="0">
                 <a:cs typeface="B Nazanin"/>
               </a:rPr>
-              <a:t>«۱ دقیقه و ۳۰ ثانیه» این اسلاید تفسیر اسلاید قبل را عوض می‌کند. بگویید حتی دو کارشناس انسانی هم سقف یک و نیم درصد را برآورده نمی‌کنند، پس سقف واقعی صد درصد نیست. در پایان صادقانه اضافه کنید که با کسر نویز مرجع خطا فقط به ۳٫۷ می‌رسد؛ این نویز بهانه نیست.</a:t>
+              <a:t>«۱ دقیقه و ۳۰ ثانیه» این اسلاید تفسیر اسلاید پیشین را تعدیل می‌کند. عدم برآورده شدن سقف ۱٫۵ درصدی در توافق دو کارشناس انسانی بیان شود. در پایان ذکر گردد که با کسر نویز مرجع، خطای سامانه تنها به ۳٫۷ میلی‌متر کاهش می‌یابد.</a:t>
             </a:r>
             <a:endParaRPr lang="en-US" dirty="0"/>
           </a:p>
@@ -1545,7 +1545,7 @@
               <a:rPr lang="fa-IR" dirty="0">
                 <a:cs typeface="B Nazanin"/>
               </a:rPr>
-              <a:t>«۱ دقیقه و ۳۰ ثانیه» سه عدد پوشش و سه عدد خطا را کنار هم بگذارید. پیام یک جمله است: هیچ روشی هم پوشش خوب دارد و هم دقت خوب؛ ترکیب برای همین ساخته شد.</a:t>
+              <a:t>«۱ دقیقه و ۳۰ ثانیه» سه عدد پوشش در کنار سه عدد خطا قرار داده شود. جمع‌بندی بخش: مبادله میان پوشش و دقت، مبنای طراحی قاعده ترکیب بوده است.</a:t>
             </a:r>
             <a:endParaRPr lang="en-US" dirty="0"/>
           </a:p>
@@ -1636,7 +1636,7 @@
               <a:rPr lang="fa-IR" dirty="0">
                 <a:cs typeface="B Nazanin"/>
               </a:rPr>
-              <a:t>«۵ ثانیه» فقط عنوان بخش را بگویید و رد شوید. این اسلاید برای مخاطب است، نه برای شما.</a:t>
+              <a:t>«۵ ثانیه» تنها عنوان بخش اعلام و بلافاصله به اسلاید بعد منتقل شوید.</a:t>
             </a:r>
             <a:endParaRPr lang="en-US" dirty="0"/>
           </a:p>
@@ -1727,7 +1727,7 @@
               <a:rPr lang="fa-IR" dirty="0">
                 <a:cs typeface="B Nazanin"/>
               </a:rPr>
-              <a:t>«۵ ثانیه» رد شوید.</a:t>
+              <a:t>«۵ ثانیه» انتقال سریع.</a:t>
             </a:r>
             <a:endParaRPr lang="en-US" dirty="0"/>
           </a:p>
@@ -1818,7 +1818,7 @@
               <a:rPr lang="fa-IR" dirty="0">
                 <a:cs typeface="B Nazanin"/>
               </a:rPr>
-              <a:t>«۴۰ ثانیه» هفت سرفصل را بخوانید و بگویید ارائه بیست دقیقه است و پرسش‌ها در پایان. توضیح ندهید.</a:t>
+              <a:t>«۴۰ ثانیه» هفت سرفصل قرائت شود، به همراه اعلام مدت ارائه و زمان پرسش و پاسخ. توضیح افزوده لازم نیست.</a:t>
             </a:r>
             <a:endParaRPr lang="en-US" dirty="0"/>
           </a:p>
@@ -1909,7 +1909,7 @@
               <a:rPr lang="fa-IR" dirty="0">
                 <a:cs typeface="B Nazanin"/>
               </a:rPr>
-              <a:t>«۵ ثانیه» رد شوید.</a:t>
+              <a:t>«۵ ثانیه» انتقال سریع.</a:t>
             </a:r>
             <a:endParaRPr lang="en-US" dirty="0"/>
           </a:p>
@@ -2000,7 +2000,7 @@
               <a:rPr lang="fa-IR" dirty="0">
                 <a:cs typeface="B Nazanin"/>
               </a:rPr>
-              <a:t>«۵ ثانیه» رد شوید.</a:t>
+              <a:t>«۵ ثانیه» انتقال سریع.</a:t>
             </a:r>
             <a:endParaRPr lang="en-US" dirty="0"/>
           </a:p>
@@ -2091,7 +2091,7 @@
               <a:rPr lang="fa-IR" dirty="0">
                 <a:cs typeface="B Nazanin"/>
               </a:rPr>
-              <a:t>«۵ ثانیه» رد شوید.</a:t>
+              <a:t>«۵ ثانیه» انتقال سریع.</a:t>
             </a:r>
             <a:endParaRPr lang="en-US" dirty="0"/>
           </a:p>
@@ -2182,7 +2182,7 @@
               <a:rPr lang="fa-IR" dirty="0">
                 <a:cs typeface="B Nazanin"/>
               </a:rPr>
-              <a:t>«۵ ثانیه» رد شوید.</a:t>
+              <a:t>«۵ ثانیه» انتقال سریع.</a:t>
             </a:r>
             <a:endParaRPr lang="en-US" dirty="0"/>
           </a:p>
@@ -2273,7 +2273,7 @@
               <a:rPr lang="fa-IR" dirty="0">
                 <a:cs typeface="B Nazanin"/>
               </a:rPr>
-              <a:t>«۵ ثانیه» رد شوید.</a:t>
+              <a:t>«۵ ثانیه» انتقال سریع.</a:t>
             </a:r>
             <a:endParaRPr lang="en-US" dirty="0"/>
           </a:p>
@@ -2364,7 +2364,7 @@
               <a:rPr lang="fa-IR" dirty="0">
                 <a:cs typeface="B Nazanin"/>
               </a:rPr>
-              <a:t>«۲ دقیقه» با تصویر ذهنی شروع کنید: کارشناس، خط‌کش، ظرف پتری. بعد بگویید همین قطر داروی بیمار را تعیین می‌کند. عدد ۱٫۲۷ میلیون را آرام بگویید و مکث کنید.</a:t>
+              <a:t>«۲ دقیقه» ابتدا شرح مختصر آزمون، سپس بیان سه محدودیت روش دستی. عدد ۱٫۲۷ میلیون با آهنگ آرام بیان و پس از آن مکث کوتاه انجام شود.</a:t>
             </a:r>
             <a:endParaRPr lang="en-US" dirty="0"/>
           </a:p>
@@ -2455,7 +2455,7 @@
               <a:rPr lang="fa-IR" dirty="0">
                 <a:cs typeface="B Nazanin"/>
               </a:rPr>
-              <a:t>«۱ دقیقه» سه پرسش را بخوانید و تاکید کنید پرسش سوم مهم‌ترین است و پاسخش صادقانه داده خواهد شد، چه مثبت چه منفی.</a:t>
+              <a:t>«۱ دقیقه» سه هدف به ترتیب قرائت شود، با تأکید بر اینکه پاسخ هدف سوم در این ارائه به صورت کامل و بدون تعدیل بیان خواهد شد.</a:t>
             </a:r>
             <a:endParaRPr lang="en-US" dirty="0"/>
           </a:p>
@@ -2546,7 +2546,7 @@
               <a:rPr lang="fa-IR" dirty="0">
                 <a:cs typeface="B Nazanin"/>
               </a:rPr>
-              <a:t>«۱ دقیقه» صریح بگویید دسته یادگیری عمیق دقیق‌تر از این سامانه است. پنهان کردنش اولین پرسش داور می‌شود. بعد بگویید سهم این کار چیز دیگری است.</a:t>
+              <a:t>«۱ دقیقه» برتری دقت عددی دسته یادگیری عمیق صریح بیان شود. سپس سهم پژوهش حاضر معرفی گردد.</a:t>
             </a:r>
             <a:endParaRPr lang="en-US" dirty="0"/>
           </a:p>
@@ -2637,7 +2637,7 @@
               <a:rPr lang="fa-IR" dirty="0">
                 <a:cs typeface="B Nazanin"/>
               </a:rPr>
-              <a:t>«۲ دقیقه» چهار مرحله را هر کدام در سی ثانیه. روی مرحله دوم تاکید کنید: قطر شش میلی‌متری دیسک تنها مرجع مطلق در کل تصویر است. در پایان بگویید هیچ پارامتری بر حسب پیکسل مطلق نیست.</a:t>
+              <a:t>«۲ دقیقه» چهار مرحله هر یک در حدود سی ثانیه شرح داده شود. بر جایگاه قطر استاندارد شش میلی‌متری به عنوان تنها مرجع مطلق تصویر تأکید شود. در پایان، نسبی بودن تمام پارامترها بیان گردد.</a:t>
             </a:r>
             <a:endParaRPr lang="en-US" dirty="0"/>
           </a:p>
@@ -2728,7 +2728,7 @@
               <a:rPr lang="fa-IR" dirty="0">
                 <a:cs typeface="B Nazanin"/>
               </a:rPr>
-              <a:t>«۲ دقیقه» صادق‌ترین بخش ارائه. اول بگویید طبقه‌بندی به قطر و گونه و نام دارو نیاز دارد و مرجع فقط قطر را داشت، پس پرسش را عوض کردیم. سه عدد را بگویید و بعد صریح: سامانه به آستانه پذیرش بالینی نمی‌رسد. مکث. بعد به نمودار بروید: هدف مهندسی خطای حدود یک میلی‌متر است.</a:t>
+              <a:t>«۲ دقیقه» ابتدا توضیح داده شود که طبقه‌بندی به قطر و گونه و نام دارو نیاز دارد و مرجع تنها قطر را در اختیار داشت، بنابراین صورت مسئله تغییر داده شد. سپس سه عدد بیان و در ادامه به صراحت اعلام شود که سامانه به آستانه پذیرش بالینی نمی‌رسد. پس از مکث، نمودار معرفی و هدف مهندسی یک میلی‌متر بیان شود.</a:t>
             </a:r>
             <a:endParaRPr lang="en-US" dirty="0"/>
           </a:p>
@@ -2819,7 +2819,7 @@
               <a:rPr lang="fa-IR" dirty="0">
                 <a:cs typeface="B Nazanin"/>
               </a:rPr>
-              <a:t>«۱ دقیقه و ۳۰ ثانیه» دو ستون را مقایسه کنید. نکته اصلی: ترکیب روی هر سه معیار بهتر یا برابر است، و خطا سی درصد کم شد. اضافه کنید که سوگیری تقریباً صفر است.</a:t>
+              <a:t>«۱ دقیقه و ۳۰ ثانیه» مقایسه دو ستون. نکته اصلی: برتری ترکیب بر هر سه معیار و کاهش سی‌درصدی خطا. نزدیک بودن سوگیری به صفر نیز ذکر شود.</a:t>
             </a:r>
             <a:endParaRPr lang="en-US" dirty="0"/>
           </a:p>
@@ -2910,7 +2910,7 @@
               <a:rPr lang="fa-IR" dirty="0">
                 <a:cs typeface="B Nazanin"/>
               </a:rPr>
-              <a:t>«۲ دقیقه و ۳۰ ثانیه» مهم‌ترین اسلاید. آرام بگویید. اول الگوی تکرارشونده، بعد عدد سه دهم، بعد دو کنترل تا نشان دهید عدد مصنوع روش نیست، بعد دو راه استانداردی که رد شد. در پایان جمله کادر را کلمه به کلمه بخوانید.</a:t>
+              <a:t>«۲ دقیقه و ۳۰ ثانیه» مهم‌ترین بخش ارائه؛ با آهنگ آرام بیان شود. ترتیب: الگوی تکرارشونده، عدد جدایش، دو کنترل، و دو راهکار رد شده. جمله کادر در پایان کلمه به کلمه قرائت گردد.</a:t>
             </a:r>
             <a:endParaRPr lang="en-US" dirty="0"/>
           </a:p>
@@ -3903,7 +3903,7 @@
                 <a:ea typeface="Calibri" pitchFamily="34" charset="-122"/>
                 <a:cs typeface="B Nazanin" pitchFamily="34" charset="-120"/>
               </a:rPr>
-              <a:t>یازده عکس و ۹۳ دیسک، همه از یک آزمایشگاه با یک دوربین. توصیف اولیه از دقت، نه اعتبارسنجی بالینی.</a:t>
+              <a:t>یازده تصویر و ۹۳ دیسک، تماماً از یک آزمایشگاه و با یک دوربین. این ارزیابی توصیفی اولیه از دقت است و اعتبارسنجی بالینی محسوب نمی‌شود.</a:t>
             </a:r>
             <a:endParaRPr lang="en-US" sz="1350" dirty="0"/>
           </a:p>
@@ -4043,7 +4043,7 @@
                 <a:ea typeface="Calibri" pitchFamily="34" charset="-122"/>
                 <a:cs typeface="B Nazanin" pitchFamily="34" charset="-120"/>
               </a:rPr>
-              <a:t>عکس‌ها با تلفن همراه و در نور اتاق گرفته شده‌اند؛ استاندارد نور بازتابی و زمینه تیره را توصیه می‌کند.</a:t>
+              <a:t>تصاویر با تلفن همراه و در نور معمولی اتاق تهیه شده‌اند، در حالی که استاندارد، نور بازتابی و زمینه تیره را توصیه می‌کند.</a:t>
             </a:r>
             <a:endParaRPr lang="en-US" sz="1350" dirty="0"/>
           </a:p>
@@ -4183,7 +4183,7 @@
                 <a:ea typeface="Calibri" pitchFamily="34" charset="-122"/>
                 <a:cs typeface="B Nazanin" pitchFamily="34" charset="-120"/>
               </a:rPr>
-              <a:t>عدد دو میلی‌متری کارشناس یک اظهار شفاهی است. نام دارو خوانده نمی‌شود. زمان اجرا یک تا سه دقیقه است.</a:t>
+              <a:t>عدد دو میلی‌متری تکرارپذیری کارشناس مبتنی بر اظهار شفاهی است. نام دارو استخراج نمی‌شود. زمان اجرا یک تا سه دقیقه برای هر تصویر است.</a:t>
             </a:r>
             <a:endParaRPr lang="en-US" sz="1350" dirty="0"/>
           </a:p>
@@ -4502,7 +4502,7 @@
                 <a:ea typeface="Calibri" pitchFamily="34" charset="-122"/>
                 <a:cs typeface="B Nazanin" pitchFamily="34" charset="-120"/>
               </a:rPr>
-              <a:t>زنجیره‌ای کامل و قطعی از عکس خام تا دسته بالینی. نتیجه روی سه ماشین مستقل بازتولید شد، در یکی بیت به بیت.</a:t>
+              <a:t>زنجیره‌ای کامل و قطعی از تصویر خام تا دسته بالینی. نتایج بر روی سه ماشین مستقل بازتولید شد و در یکی از آن‌ها خروجی تصویری بیت به بیت یکسان بود.</a:t>
             </a:r>
             <a:endParaRPr lang="en-US" sz="1400" dirty="0"/>
           </a:p>
@@ -4605,7 +4605,7 @@
                 <a:ea typeface="Calibri" pitchFamily="34" charset="-122"/>
                 <a:cs typeface="B Nazanin" pitchFamily="34" charset="-120"/>
               </a:rPr>
-              <a:t>مرز هاله با سه روش موازی و ترکیب بر پایه نقاط قوت اندازه‌گیری‌شده. این ترکیب خطا را سی درصد کاهش داد.</a:t>
+              <a:t>تعیین مرز هاله با سه روش موازی و ترکیب آن‌ها بر پایه نقاط قوت اندازه‌گیری‌شده. این ترکیب، خطا را سی درصد کاهش داد.</a:t>
             </a:r>
             <a:endParaRPr lang="en-US" sz="1400" dirty="0"/>
           </a:p>
@@ -4708,7 +4708,7 @@
                 <a:ea typeface="Calibri" pitchFamily="34" charset="-122"/>
                 <a:cs typeface="B Nazanin" pitchFamily="34" charset="-120"/>
               </a:rPr>
-              <a:t>هر تصمیم طراحی با اندازه‌گیری سنجیده شد، از جمله معیاری که در اعتبارسنجی متقاطع رد شد و کنار گذاشته شد.</a:t>
+              <a:t>هر تصمیم طراحی با اندازه‌گیری بر روی داده مرجع سنجیده شد، از جمله معیاری که در اعتبارسنجی متقاطع رد و کنار گذاشته شد.</a:t>
             </a:r>
             <a:endParaRPr lang="en-US" sz="1400" dirty="0"/>
           </a:p>
@@ -4770,7 +4770,7 @@
                 <a:ea typeface="Cambria" pitchFamily="34" charset="-122"/>
                 <a:cs typeface="B Titr" pitchFamily="34" charset="-120"/>
               </a:rPr>
-              <a:t>یافتن دیسک حل شده است. تعیین مرز هاله تا حدی حل شده، و علت باقی‌مانده‌اش اندازه‌گیری شده است، نه حدس زده.</a:t>
+              <a:t>مسئله یافتن دیسک حل شده و مسئله تعیین مرز هاله تا حدی حل شده است. علت خطای باقی‌مانده نیز به صورت کمی اندازه‌گیری شده است.</a:t>
             </a:r>
             <a:endParaRPr lang="en-US" sz="1600" dirty="0"/>
           </a:p>
@@ -5109,7 +5109,7 @@
                 <a:ea typeface="Calibri" pitchFamily="34" charset="-122"/>
                 <a:cs typeface="B Nazanin" pitchFamily="34" charset="-120"/>
               </a:rPr>
-              <a:t>افزودن مدل سیگموئید گذار شعاعی. سنجش آفلاین روی ۵۷ دیسک مشترک: خطای ۲٫۷۹ و میانه ۱٫۰۳ میلی‌متر.</a:t>
+              <a:t>افزودن مدل سیگموئید گذار شعاعی. سنجش برون‌خط بر روی ۵۷ دیسک مشترک، خطای متوسط ۲٫۷۹ و میانه ۱٫۰۳ میلی‌متر داد.</a:t>
             </a:r>
             <a:endParaRPr lang="en-US" sz="1350" dirty="0"/>
           </a:p>
@@ -5232,7 +5232,7 @@
                 <a:ea typeface="Calibri" pitchFamily="34" charset="-122"/>
                 <a:cs typeface="B Nazanin" pitchFamily="34" charset="-120"/>
               </a:rPr>
-              <a:t>چهار شرط تصویربرداری: نور از پشت ظرف، کارت خاکستری مرجع، عکس در چند زمان، و مربع مرجع ۱۰ میلی‌متری.</a:t>
+              <a:t>چهار شرط تصویربرداری: نورپردازی از پشت ظرف، کارت خاکستری مرجع، تصویربرداری در چند زمان، و مربع مرجع ۱۰ میلی‌متری.</a:t>
             </a:r>
             <a:endParaRPr lang="en-US" sz="1350" dirty="0"/>
           </a:p>
@@ -5355,7 +5355,7 @@
                 <a:ea typeface="Calibri" pitchFamily="34" charset="-122"/>
                 <a:cs typeface="B Nazanin" pitchFamily="34" charset="-120"/>
               </a:rPr>
-              <a:t>مجموعه مرجع بزرگ‌تر با چند آزمایشگاه و چند دوربین، و دور دوم اندازه‌گیری کارشناسی.</a:t>
+              <a:t>تهیه مجموعه مرجع بزرگ‌تر با چند آزمایشگاه و چند دوربین، و انجام دور دوم اندازه‌گیری کارشناسی.</a:t>
             </a:r>
             <a:endParaRPr lang="en-US" sz="1350" dirty="0"/>
           </a:p>
@@ -6286,7 +6286,7 @@
                 <a:ea typeface="Calibri" pitchFamily="34" charset="-122"/>
                 <a:cs typeface="B Nazanin" pitchFamily="34" charset="-120"/>
               </a:rPr>
-              <a:t>۱۱ از ۱۱ عکس. هر ۱۱ عکس از یک آزمایشگاه‌اند؛ این عدد را باید با احتیاط خواند.</a:t>
+              <a:t>۱۱ از ۱۱ تصویر. تمام تصاویر از یک آزمایشگاه تهیه شده‌اند و تعمیم این عدد نیازمند احتیاط است.</a:t>
             </a:r>
             <a:endParaRPr lang="en-US" sz="1400" dirty="0"/>
           </a:p>
@@ -6448,7 +6448,7 @@
                 <a:ea typeface="Calibri" pitchFamily="34" charset="-122"/>
                 <a:cs typeface="B Nazanin" pitchFamily="34" charset="-120"/>
               </a:rPr>
-              <a:t>F1 برابر ۰٫۹۸۹، با صحت ۱٫۰۰۰ و بازخوانی ۰٫۹۷۸. دو دیسک از دست رفت.</a:t>
+              <a:t>امتیاز F1 برابر ۰٫۹۸۹، با صحت ۱٫۰۰۰ و بازخوانی ۰٫۹۷۸. دو دیسک تشخیص داده نشد.</a:t>
             </a:r>
             <a:endParaRPr lang="en-US" sz="1400" dirty="0"/>
           </a:p>
@@ -6610,7 +6610,7 @@
                 <a:ea typeface="Calibri" pitchFamily="34" charset="-122"/>
                 <a:cs typeface="B Nazanin" pitchFamily="34" charset="-120"/>
               </a:rPr>
-              <a:t>دقت ۰٫۸۲۴. هاله واقعی کم از دست می‌رود؛ گاهی هاله‌ای گزارش می‌شود که نیست.</a:t>
+              <a:t>دقت ۰٫۸۲۴. نرخ منفی کاذب پایین و نرخ مثبت کاذب نسبتاً بالاست.</a:t>
             </a:r>
             <a:endParaRPr lang="en-US" sz="1400" dirty="0"/>
           </a:p>
@@ -7030,7 +7030,7 @@
                 <a:ea typeface="Calibri" pitchFamily="34" charset="-122"/>
                 <a:cs typeface="B Nazanin" pitchFamily="34" charset="-120"/>
               </a:rPr>
-              <a:t>حتی دو کارشناس انسانی هم سقف ۱٫۵ درصدی را برآورده نمی‌کنند.</a:t>
+              <a:t>سقف ۱٫۵ درصدی در توافق دو کارشناس انسانی نیز برآورده نمی‌شود.</a:t>
             </a:r>
             <a:endParaRPr lang="en-US" sz="1400" dirty="0"/>
           </a:p>
@@ -7234,7 +7234,7 @@
                 <a:ea typeface="Calibri" pitchFamily="34" charset="-122"/>
                 <a:cs typeface="B Nazanin" pitchFamily="34" charset="-120"/>
               </a:rPr>
-              <a:t>سقف واقعی حدود ۹۲ تا ۹۶ درصد است؛ فاصله سامانه ده واحد است، نه هجده.</a:t>
+              <a:t>سقف قابل دستیابی در برابر این مرجع حدود ۹۲ تا ۹۶ درصد، و فاصله سامانه تا آن حدود ده واحد درصد است.</a:t>
             </a:r>
             <a:endParaRPr lang="en-US" sz="1400" dirty="0"/>
           </a:p>
@@ -8172,7 +8172,7 @@
                 <a:ea typeface="Calibri" pitchFamily="34" charset="-122"/>
                 <a:cs typeface="B Nazanin" pitchFamily="34" charset="-120"/>
               </a:rPr>
-              <a:t>چرا خودکار کردن این اندازه‌گیری ارزش دارد</a:t>
+              <a:t>ضرورت خودکارسازی این اندازه‌گیری</a:t>
             </a:r>
             <a:endParaRPr lang="en-US" sz="1200" dirty="0"/>
           </a:p>
@@ -8309,7 +8309,7 @@
                 <a:ea typeface="Calibri" pitchFamily="34" charset="-122"/>
                 <a:cs typeface="B Nazanin" pitchFamily="34" charset="-120"/>
               </a:rPr>
-              <a:t>این پژوهش دنبال چیست</a:t>
+              <a:t>اهداف پژوهش و جایگاه آن در ادبیات</a:t>
             </a:r>
             <a:endParaRPr lang="en-US" sz="1200" dirty="0"/>
           </a:p>
@@ -8446,7 +8446,7 @@
                 <a:ea typeface="Calibri" pitchFamily="34" charset="-122"/>
                 <a:cs typeface="B Nazanin" pitchFamily="34" charset="-120"/>
               </a:rPr>
-              <a:t>سامانه چگونه کار می‌کند</a:t>
+              <a:t>ساختار و مراحل سامانه</a:t>
             </a:r>
             <a:endParaRPr lang="en-US" sz="1200" dirty="0"/>
           </a:p>
@@ -8583,7 +8583,7 @@
                 <a:ea typeface="Calibri" pitchFamily="34" charset="-122"/>
                 <a:cs typeface="B Nazanin" pitchFamily="34" charset="-120"/>
               </a:rPr>
-              <a:t>چقدر دقیق است</a:t>
+              <a:t>دقت اندازه‌گیری بر روی مجموعه مرجع</a:t>
             </a:r>
             <a:endParaRPr lang="en-US" sz="1200" dirty="0"/>
           </a:p>
@@ -8720,7 +8720,7 @@
                 <a:ea typeface="Calibri" pitchFamily="34" charset="-122"/>
                 <a:cs typeface="B Nazanin" pitchFamily="34" charset="-120"/>
               </a:rPr>
-              <a:t>این دقت یعنی چه</a:t>
+              <a:t>معنای دقت به‌دست‌آمده برای تصمیم درمانی</a:t>
             </a:r>
             <a:endParaRPr lang="en-US" sz="1200" dirty="0"/>
           </a:p>
@@ -8857,7 +8857,7 @@
                 <a:ea typeface="Calibri" pitchFamily="34" charset="-122"/>
                 <a:cs typeface="B Nazanin" pitchFamily="34" charset="-120"/>
               </a:rPr>
-              <a:t>چرا خطا همان‌جاست</a:t>
+              <a:t>علت خطای باقی‌مانده</a:t>
             </a:r>
             <a:endParaRPr lang="en-US" sz="1200" dirty="0"/>
           </a:p>
@@ -8994,7 +8994,7 @@
                 <a:ea typeface="Calibri" pitchFamily="34" charset="-122"/>
                 <a:cs typeface="B Nazanin" pitchFamily="34" charset="-120"/>
               </a:rPr>
-              <a:t>دستاوردها و قدم بعد</a:t>
+              <a:t>محدودیت‌ها، دستاوردها و کار آینده</a:t>
             </a:r>
             <a:endParaRPr lang="en-US" sz="1200" dirty="0"/>
           </a:p>
@@ -9347,7 +9347,7 @@
                 <a:ea typeface="Calibri" pitchFamily="34" charset="-122"/>
                 <a:cs typeface="B Nazanin" pitchFamily="34" charset="-120"/>
               </a:rPr>
-              <a:t>چرا خودکار کردن این اندازه‌گیری ارزش دارد</a:t>
+              <a:t>ضرورت خودکارسازی این اندازه‌گیری</a:t>
             </a:r>
             <a:endParaRPr lang="en-US" sz="1200" dirty="0"/>
           </a:p>
@@ -9484,7 +9484,7 @@
                 <a:ea typeface="Calibri" pitchFamily="34" charset="-122"/>
                 <a:cs typeface="B Nazanin" pitchFamily="34" charset="-120"/>
               </a:rPr>
-              <a:t>این پژوهش دنبال چیست</a:t>
+              <a:t>اهداف پژوهش و جایگاه آن در ادبیات</a:t>
             </a:r>
             <a:endParaRPr lang="en-US" sz="1200" dirty="0"/>
           </a:p>
@@ -9621,7 +9621,7 @@
                 <a:ea typeface="Calibri" pitchFamily="34" charset="-122"/>
                 <a:cs typeface="B Nazanin" pitchFamily="34" charset="-120"/>
               </a:rPr>
-              <a:t>سامانه چگونه کار می‌کند</a:t>
+              <a:t>ساختار و مراحل سامانه</a:t>
             </a:r>
             <a:endParaRPr lang="en-US" sz="1200" dirty="0"/>
           </a:p>
@@ -9758,7 +9758,7 @@
                 <a:ea typeface="Calibri" pitchFamily="34" charset="-122"/>
                 <a:cs typeface="B Nazanin" pitchFamily="34" charset="-120"/>
               </a:rPr>
-              <a:t>چقدر دقیق است</a:t>
+              <a:t>دقت اندازه‌گیری بر روی مجموعه مرجع</a:t>
             </a:r>
             <a:endParaRPr lang="en-US" sz="1200" dirty="0"/>
           </a:p>
@@ -9895,7 +9895,7 @@
                 <a:ea typeface="Calibri" pitchFamily="34" charset="-122"/>
                 <a:cs typeface="B Nazanin" pitchFamily="34" charset="-120"/>
               </a:rPr>
-              <a:t>این دقت یعنی چه</a:t>
+              <a:t>معنای دقت به‌دست‌آمده برای تصمیم درمانی</a:t>
             </a:r>
             <a:endParaRPr lang="en-US" sz="1200" dirty="0"/>
           </a:p>
@@ -10032,7 +10032,7 @@
                 <a:ea typeface="Calibri" pitchFamily="34" charset="-122"/>
                 <a:cs typeface="B Nazanin" pitchFamily="34" charset="-120"/>
               </a:rPr>
-              <a:t>چرا خطا همان‌جاست</a:t>
+              <a:t>علت خطای باقی‌مانده</a:t>
             </a:r>
             <a:endParaRPr lang="en-US" sz="1200" dirty="0"/>
           </a:p>
@@ -10169,7 +10169,7 @@
                 <a:ea typeface="Calibri" pitchFamily="34" charset="-122"/>
                 <a:cs typeface="B Nazanin" pitchFamily="34" charset="-120"/>
               </a:rPr>
-              <a:t>دستاوردها و قدم بعد</a:t>
+              <a:t>محدودیت‌ها، دستاوردها و کار آینده</a:t>
             </a:r>
             <a:endParaRPr lang="en-US" sz="1200" dirty="0"/>
           </a:p>
@@ -10522,7 +10522,7 @@
                 <a:ea typeface="Calibri" pitchFamily="34" charset="-122"/>
                 <a:cs typeface="B Nazanin" pitchFamily="34" charset="-120"/>
               </a:rPr>
-              <a:t>چرا خودکار کردن این اندازه‌گیری ارزش دارد — ۲ دقیقه</a:t>
+              <a:t>ضرورت خودکارسازی این اندازه‌گیری — ۲ دقیقه</a:t>
             </a:r>
             <a:endParaRPr lang="en-US" sz="1200" dirty="0"/>
           </a:p>
@@ -10659,7 +10659,7 @@
                 <a:ea typeface="Calibri" pitchFamily="34" charset="-122"/>
                 <a:cs typeface="B Nazanin" pitchFamily="34" charset="-120"/>
               </a:rPr>
-              <a:t>این پژوهش دنبال چیست — ۲ دقیقه</a:t>
+              <a:t>اهداف پژوهش و جایگاه آن در ادبیات — ۲ دقیقه</a:t>
             </a:r>
             <a:endParaRPr lang="en-US" sz="1200" dirty="0"/>
           </a:p>
@@ -10796,7 +10796,7 @@
                 <a:ea typeface="Calibri" pitchFamily="34" charset="-122"/>
                 <a:cs typeface="B Nazanin" pitchFamily="34" charset="-120"/>
               </a:rPr>
-              <a:t>سامانه چگونه کار می‌کند — ۳ دقیقه و ۳۰ ثانیه</a:t>
+              <a:t>ساختار و مراحل سامانه — ۳ دقیقه و ۳۰ ثانیه</a:t>
             </a:r>
             <a:endParaRPr lang="en-US" sz="1200" dirty="0"/>
           </a:p>
@@ -10933,7 +10933,7 @@
                 <a:ea typeface="Calibri" pitchFamily="34" charset="-122"/>
                 <a:cs typeface="B Nazanin" pitchFamily="34" charset="-120"/>
               </a:rPr>
-              <a:t>چقدر دقیق است — ۲ دقیقه و ۳۰ ثانیه</a:t>
+              <a:t>دقت اندازه‌گیری بر روی مجموعه مرجع — ۲ دقیقه و ۳۰ ثانیه</a:t>
             </a:r>
             <a:endParaRPr lang="en-US" sz="1200" dirty="0"/>
           </a:p>
@@ -11070,7 +11070,7 @@
                 <a:ea typeface="Calibri" pitchFamily="34" charset="-122"/>
                 <a:cs typeface="B Nazanin" pitchFamily="34" charset="-120"/>
               </a:rPr>
-              <a:t>این دقت یعنی چه — ۳ دقیقه و ۳۰ ثانیه</a:t>
+              <a:t>معنای دقت به‌دست‌آمده برای تصمیم درمانی — ۳ دقیقه و ۳۰ ثانیه</a:t>
             </a:r>
             <a:endParaRPr lang="en-US" sz="1200" dirty="0"/>
           </a:p>
@@ -11207,7 +11207,7 @@
                 <a:ea typeface="Calibri" pitchFamily="34" charset="-122"/>
                 <a:cs typeface="B Nazanin" pitchFamily="34" charset="-120"/>
               </a:rPr>
-              <a:t>چرا خطا همان‌جاست — ۲ دقیقه و ۳۰ ثانیه</a:t>
+              <a:t>علت خطای باقی‌مانده — ۲ دقیقه و ۳۰ ثانیه</a:t>
             </a:r>
             <a:endParaRPr lang="en-US" sz="1200" dirty="0"/>
           </a:p>
@@ -11344,7 +11344,7 @@
                 <a:ea typeface="Calibri" pitchFamily="34" charset="-122"/>
                 <a:cs typeface="B Nazanin" pitchFamily="34" charset="-120"/>
               </a:rPr>
-              <a:t>دستاوردها و قدم بعد — ۳ دقیقه</a:t>
+              <a:t>محدودیت‌ها، دستاوردها و کار آینده — ۳ دقیقه</a:t>
             </a:r>
             <a:endParaRPr lang="en-US" sz="1200" dirty="0"/>
           </a:p>
@@ -11697,7 +11697,7 @@
                 <a:ea typeface="Calibri" pitchFamily="34" charset="-122"/>
                 <a:cs typeface="B Nazanin" pitchFamily="34" charset="-120"/>
               </a:rPr>
-              <a:t>چرا خودکار کردن این اندازه‌گیری ارزش دارد</a:t>
+              <a:t>ضرورت خودکارسازی این اندازه‌گیری</a:t>
             </a:r>
             <a:endParaRPr lang="en-US" sz="1200" dirty="0"/>
           </a:p>
@@ -11834,7 +11834,7 @@
                 <a:ea typeface="Calibri" pitchFamily="34" charset="-122"/>
                 <a:cs typeface="B Nazanin" pitchFamily="34" charset="-120"/>
               </a:rPr>
-              <a:t>این پژوهش دنبال چیست</a:t>
+              <a:t>اهداف پژوهش و جایگاه آن در ادبیات</a:t>
             </a:r>
             <a:endParaRPr lang="en-US" sz="1200" dirty="0"/>
           </a:p>
@@ -11971,7 +11971,7 @@
                 <a:ea typeface="Calibri" pitchFamily="34" charset="-122"/>
                 <a:cs typeface="B Nazanin" pitchFamily="34" charset="-120"/>
               </a:rPr>
-              <a:t>سامانه چگونه کار می‌کند</a:t>
+              <a:t>ساختار و مراحل سامانه</a:t>
             </a:r>
             <a:endParaRPr lang="en-US" sz="1200" dirty="0"/>
           </a:p>
@@ -12108,7 +12108,7 @@
                 <a:ea typeface="Calibri" pitchFamily="34" charset="-122"/>
                 <a:cs typeface="B Nazanin" pitchFamily="34" charset="-120"/>
               </a:rPr>
-              <a:t>چقدر دقیق است</a:t>
+              <a:t>دقت اندازه‌گیری بر روی مجموعه مرجع</a:t>
             </a:r>
             <a:endParaRPr lang="en-US" sz="1200" dirty="0"/>
           </a:p>
@@ -12245,7 +12245,7 @@
                 <a:ea typeface="Calibri" pitchFamily="34" charset="-122"/>
                 <a:cs typeface="B Nazanin" pitchFamily="34" charset="-120"/>
               </a:rPr>
-              <a:t>این دقت یعنی چه</a:t>
+              <a:t>معنای دقت به‌دست‌آمده برای تصمیم درمانی</a:t>
             </a:r>
             <a:endParaRPr lang="en-US" sz="1200" dirty="0"/>
           </a:p>
@@ -12382,7 +12382,7 @@
                 <a:ea typeface="Calibri" pitchFamily="34" charset="-122"/>
                 <a:cs typeface="B Nazanin" pitchFamily="34" charset="-120"/>
               </a:rPr>
-              <a:t>چرا خطا همان‌جاست</a:t>
+              <a:t>علت خطای باقی‌مانده</a:t>
             </a:r>
             <a:endParaRPr lang="en-US" sz="1200" dirty="0"/>
           </a:p>
@@ -12519,7 +12519,7 @@
                 <a:ea typeface="Calibri" pitchFamily="34" charset="-122"/>
                 <a:cs typeface="B Nazanin" pitchFamily="34" charset="-120"/>
               </a:rPr>
-              <a:t>دستاوردها و قدم بعد</a:t>
+              <a:t>محدودیت‌ها، دستاوردها و کار آینده</a:t>
             </a:r>
             <a:endParaRPr lang="en-US" sz="1200" dirty="0"/>
           </a:p>
@@ -12872,7 +12872,7 @@
                 <a:ea typeface="Calibri" pitchFamily="34" charset="-122"/>
                 <a:cs typeface="B Nazanin" pitchFamily="34" charset="-120"/>
               </a:rPr>
-              <a:t>چرا خودکار کردن این اندازه‌گیری ارزش دارد</a:t>
+              <a:t>ضرورت خودکارسازی این اندازه‌گیری</a:t>
             </a:r>
             <a:endParaRPr lang="en-US" sz="1200" dirty="0"/>
           </a:p>
@@ -13009,7 +13009,7 @@
                 <a:ea typeface="Calibri" pitchFamily="34" charset="-122"/>
                 <a:cs typeface="B Nazanin" pitchFamily="34" charset="-120"/>
               </a:rPr>
-              <a:t>این پژوهش دنبال چیست</a:t>
+              <a:t>اهداف پژوهش و جایگاه آن در ادبیات</a:t>
             </a:r>
             <a:endParaRPr lang="en-US" sz="1200" dirty="0"/>
           </a:p>
@@ -13146,7 +13146,7 @@
                 <a:ea typeface="Calibri" pitchFamily="34" charset="-122"/>
                 <a:cs typeface="B Nazanin" pitchFamily="34" charset="-120"/>
               </a:rPr>
-              <a:t>سامانه چگونه کار می‌کند</a:t>
+              <a:t>ساختار و مراحل سامانه</a:t>
             </a:r>
             <a:endParaRPr lang="en-US" sz="1200" dirty="0"/>
           </a:p>
@@ -13283,7 +13283,7 @@
                 <a:ea typeface="Calibri" pitchFamily="34" charset="-122"/>
                 <a:cs typeface="B Nazanin" pitchFamily="34" charset="-120"/>
               </a:rPr>
-              <a:t>چقدر دقیق است</a:t>
+              <a:t>دقت اندازه‌گیری بر روی مجموعه مرجع</a:t>
             </a:r>
             <a:endParaRPr lang="en-US" sz="1200" dirty="0"/>
           </a:p>
@@ -13420,7 +13420,7 @@
                 <a:ea typeface="Calibri" pitchFamily="34" charset="-122"/>
                 <a:cs typeface="B Nazanin" pitchFamily="34" charset="-120"/>
               </a:rPr>
-              <a:t>این دقت یعنی چه</a:t>
+              <a:t>معنای دقت به‌دست‌آمده برای تصمیم درمانی</a:t>
             </a:r>
             <a:endParaRPr lang="en-US" sz="1200" dirty="0"/>
           </a:p>
@@ -13557,7 +13557,7 @@
                 <a:ea typeface="Calibri" pitchFamily="34" charset="-122"/>
                 <a:cs typeface="B Nazanin" pitchFamily="34" charset="-120"/>
               </a:rPr>
-              <a:t>چرا خطا همان‌جاست</a:t>
+              <a:t>علت خطای باقی‌مانده</a:t>
             </a:r>
             <a:endParaRPr lang="en-US" sz="1200" dirty="0"/>
           </a:p>
@@ -13694,7 +13694,7 @@
                 <a:ea typeface="Calibri" pitchFamily="34" charset="-122"/>
                 <a:cs typeface="B Nazanin" pitchFamily="34" charset="-120"/>
               </a:rPr>
-              <a:t>دستاوردها و قدم بعد</a:t>
+              <a:t>محدودیت‌ها، دستاوردها و کار آینده</a:t>
             </a:r>
             <a:endParaRPr lang="en-US" sz="1200" dirty="0"/>
           </a:p>
@@ -14047,7 +14047,7 @@
                 <a:ea typeface="Calibri" pitchFamily="34" charset="-122"/>
                 <a:cs typeface="B Nazanin" pitchFamily="34" charset="-120"/>
               </a:rPr>
-              <a:t>چرا خودکار کردن این اندازه‌گیری ارزش دارد</a:t>
+              <a:t>ضرورت خودکارسازی این اندازه‌گیری</a:t>
             </a:r>
             <a:endParaRPr lang="en-US" sz="1200" dirty="0"/>
           </a:p>
@@ -14184,7 +14184,7 @@
                 <a:ea typeface="Calibri" pitchFamily="34" charset="-122"/>
                 <a:cs typeface="B Nazanin" pitchFamily="34" charset="-120"/>
               </a:rPr>
-              <a:t>این پژوهش دنبال چیست</a:t>
+              <a:t>اهداف پژوهش و جایگاه آن در ادبیات</a:t>
             </a:r>
             <a:endParaRPr lang="en-US" sz="1200" dirty="0"/>
           </a:p>
@@ -14321,7 +14321,7 @@
                 <a:ea typeface="Calibri" pitchFamily="34" charset="-122"/>
                 <a:cs typeface="B Nazanin" pitchFamily="34" charset="-120"/>
               </a:rPr>
-              <a:t>سامانه چگونه کار می‌کند</a:t>
+              <a:t>ساختار و مراحل سامانه</a:t>
             </a:r>
             <a:endParaRPr lang="en-US" sz="1200" dirty="0"/>
           </a:p>
@@ -14458,7 +14458,7 @@
                 <a:ea typeface="Calibri" pitchFamily="34" charset="-122"/>
                 <a:cs typeface="B Nazanin" pitchFamily="34" charset="-120"/>
               </a:rPr>
-              <a:t>چقدر دقیق است</a:t>
+              <a:t>دقت اندازه‌گیری بر روی مجموعه مرجع</a:t>
             </a:r>
             <a:endParaRPr lang="en-US" sz="1200" dirty="0"/>
           </a:p>
@@ -14595,7 +14595,7 @@
                 <a:ea typeface="Calibri" pitchFamily="34" charset="-122"/>
                 <a:cs typeface="B Nazanin" pitchFamily="34" charset="-120"/>
               </a:rPr>
-              <a:t>این دقت یعنی چه</a:t>
+              <a:t>معنای دقت به‌دست‌آمده برای تصمیم درمانی</a:t>
             </a:r>
             <a:endParaRPr lang="en-US" sz="1200" dirty="0"/>
           </a:p>
@@ -14732,7 +14732,7 @@
                 <a:ea typeface="Calibri" pitchFamily="34" charset="-122"/>
                 <a:cs typeface="B Nazanin" pitchFamily="34" charset="-120"/>
               </a:rPr>
-              <a:t>چرا خطا همان‌جاست</a:t>
+              <a:t>علت خطای باقی‌مانده</a:t>
             </a:r>
             <a:endParaRPr lang="en-US" sz="1200" dirty="0"/>
           </a:p>
@@ -14869,7 +14869,7 @@
                 <a:ea typeface="Calibri" pitchFamily="34" charset="-122"/>
                 <a:cs typeface="B Nazanin" pitchFamily="34" charset="-120"/>
               </a:rPr>
-              <a:t>دستاوردها و قدم بعد</a:t>
+              <a:t>محدودیت‌ها، دستاوردها و کار آینده</a:t>
             </a:r>
             <a:endParaRPr lang="en-US" sz="1200" dirty="0"/>
           </a:p>
@@ -15222,7 +15222,7 @@
                 <a:ea typeface="Calibri" pitchFamily="34" charset="-122"/>
                 <a:cs typeface="B Nazanin" pitchFamily="34" charset="-120"/>
               </a:rPr>
-              <a:t>چرا خودکار کردن این اندازه‌گیری ارزش دارد</a:t>
+              <a:t>ضرورت خودکارسازی این اندازه‌گیری</a:t>
             </a:r>
             <a:endParaRPr lang="en-US" sz="1200" dirty="0"/>
           </a:p>
@@ -15359,7 +15359,7 @@
                 <a:ea typeface="Calibri" pitchFamily="34" charset="-122"/>
                 <a:cs typeface="B Nazanin" pitchFamily="34" charset="-120"/>
               </a:rPr>
-              <a:t>این پژوهش دنبال چیست</a:t>
+              <a:t>اهداف پژوهش و جایگاه آن در ادبیات</a:t>
             </a:r>
             <a:endParaRPr lang="en-US" sz="1200" dirty="0"/>
           </a:p>
@@ -15496,7 +15496,7 @@
                 <a:ea typeface="Calibri" pitchFamily="34" charset="-122"/>
                 <a:cs typeface="B Nazanin" pitchFamily="34" charset="-120"/>
               </a:rPr>
-              <a:t>سامانه چگونه کار می‌کند</a:t>
+              <a:t>ساختار و مراحل سامانه</a:t>
             </a:r>
             <a:endParaRPr lang="en-US" sz="1200" dirty="0"/>
           </a:p>
@@ -15633,7 +15633,7 @@
                 <a:ea typeface="Calibri" pitchFamily="34" charset="-122"/>
                 <a:cs typeface="B Nazanin" pitchFamily="34" charset="-120"/>
               </a:rPr>
-              <a:t>چقدر دقیق است</a:t>
+              <a:t>دقت اندازه‌گیری بر روی مجموعه مرجع</a:t>
             </a:r>
             <a:endParaRPr lang="en-US" sz="1200" dirty="0"/>
           </a:p>
@@ -15770,7 +15770,7 @@
                 <a:ea typeface="Calibri" pitchFamily="34" charset="-122"/>
                 <a:cs typeface="B Nazanin" pitchFamily="34" charset="-120"/>
               </a:rPr>
-              <a:t>این دقت یعنی چه</a:t>
+              <a:t>معنای دقت به‌دست‌آمده برای تصمیم درمانی</a:t>
             </a:r>
             <a:endParaRPr lang="en-US" sz="1200" dirty="0"/>
           </a:p>
@@ -15907,7 +15907,7 @@
                 <a:ea typeface="Calibri" pitchFamily="34" charset="-122"/>
                 <a:cs typeface="B Nazanin" pitchFamily="34" charset="-120"/>
               </a:rPr>
-              <a:t>چرا خطا همان‌جاست</a:t>
+              <a:t>علت خطای باقی‌مانده</a:t>
             </a:r>
             <a:endParaRPr lang="en-US" sz="1200" dirty="0"/>
           </a:p>
@@ -16044,7 +16044,7 @@
                 <a:ea typeface="Calibri" pitchFamily="34" charset="-122"/>
                 <a:cs typeface="B Nazanin" pitchFamily="34" charset="-120"/>
               </a:rPr>
-              <a:t>دستاوردها و قدم بعد</a:t>
+              <a:t>محدودیت‌ها، دستاوردها و کار آینده</a:t>
             </a:r>
             <a:endParaRPr lang="en-US" sz="1200" dirty="0"/>
           </a:p>
@@ -16397,7 +16397,7 @@
                 <a:ea typeface="Calibri" pitchFamily="34" charset="-122"/>
                 <a:cs typeface="B Nazanin" pitchFamily="34" charset="-120"/>
               </a:rPr>
-              <a:t>چرا خودکار کردن این اندازه‌گیری ارزش دارد</a:t>
+              <a:t>ضرورت خودکارسازی این اندازه‌گیری</a:t>
             </a:r>
             <a:endParaRPr lang="en-US" sz="1200" dirty="0"/>
           </a:p>
@@ -16534,7 +16534,7 @@
                 <a:ea typeface="Calibri" pitchFamily="34" charset="-122"/>
                 <a:cs typeface="B Nazanin" pitchFamily="34" charset="-120"/>
               </a:rPr>
-              <a:t>این پژوهش دنبال چیست</a:t>
+              <a:t>اهداف پژوهش و جایگاه آن در ادبیات</a:t>
             </a:r>
             <a:endParaRPr lang="en-US" sz="1200" dirty="0"/>
           </a:p>
@@ -16671,7 +16671,7 @@
                 <a:ea typeface="Calibri" pitchFamily="34" charset="-122"/>
                 <a:cs typeface="B Nazanin" pitchFamily="34" charset="-120"/>
               </a:rPr>
-              <a:t>سامانه چگونه کار می‌کند</a:t>
+              <a:t>ساختار و مراحل سامانه</a:t>
             </a:r>
             <a:endParaRPr lang="en-US" sz="1200" dirty="0"/>
           </a:p>
@@ -16808,7 +16808,7 @@
                 <a:ea typeface="Calibri" pitchFamily="34" charset="-122"/>
                 <a:cs typeface="B Nazanin" pitchFamily="34" charset="-120"/>
               </a:rPr>
-              <a:t>چقدر دقیق است</a:t>
+              <a:t>دقت اندازه‌گیری بر روی مجموعه مرجع</a:t>
             </a:r>
             <a:endParaRPr lang="en-US" sz="1200" dirty="0"/>
           </a:p>
@@ -16945,7 +16945,7 @@
                 <a:ea typeface="Calibri" pitchFamily="34" charset="-122"/>
                 <a:cs typeface="B Nazanin" pitchFamily="34" charset="-120"/>
               </a:rPr>
-              <a:t>این دقت یعنی چه</a:t>
+              <a:t>معنای دقت به‌دست‌آمده برای تصمیم درمانی</a:t>
             </a:r>
             <a:endParaRPr lang="en-US" sz="1200" dirty="0"/>
           </a:p>
@@ -17082,7 +17082,7 @@
                 <a:ea typeface="Calibri" pitchFamily="34" charset="-122"/>
                 <a:cs typeface="B Nazanin" pitchFamily="34" charset="-120"/>
               </a:rPr>
-              <a:t>چرا خطا همان‌جاست</a:t>
+              <a:t>علت خطای باقی‌مانده</a:t>
             </a:r>
             <a:endParaRPr lang="en-US" sz="1200" dirty="0"/>
           </a:p>
@@ -17219,7 +17219,7 @@
                 <a:ea typeface="Calibri" pitchFamily="34" charset="-122"/>
                 <a:cs typeface="B Nazanin" pitchFamily="34" charset="-120"/>
               </a:rPr>
-              <a:t>دستاوردها و قدم بعد</a:t>
+              <a:t>محدودیت‌ها، دستاوردها و کار آینده</a:t>
             </a:r>
             <a:endParaRPr lang="en-US" sz="1200" dirty="0"/>
           </a:p>
@@ -17481,7 +17481,7 @@
                 <a:ea typeface="Calibri" pitchFamily="34" charset="-122"/>
                 <a:cs typeface="B Nazanin" pitchFamily="34" charset="-120"/>
               </a:rPr>
-              <a:t>مسئله: قطر ناحیه بدون رشد با خط‌کش و به دست کارشناس اندازه گرفته می‌شود.</a:t>
+              <a:t>اندازه‌گیری قطر ناحیه بدون رشد در حال حاضر به صورت دستی و با خط‌کش انجام می‌شود.</a:t>
             </a:r>
             <a:endParaRPr lang="en-US" sz="1600" dirty="0"/>
           </a:p>
@@ -17505,7 +17505,7 @@
                 <a:ea typeface="Calibri" pitchFamily="34" charset="-122"/>
                 <a:cs typeface="B Nazanin" pitchFamily="34" charset="-120"/>
               </a:rPr>
-              <a:t>چرا اهمیت دارد: همین قطر تعیین می‌کند بیمار کدام آنتی‌بیوتیک را بگیرد.</a:t>
+              <a:t>نتیجه این اندازه‌گیری، مبنای انتخاب آنتی‌بیوتیک برای بیمار است.</a:t>
             </a:r>
             <a:endParaRPr lang="en-US" sz="1600" dirty="0"/>
           </a:p>
@@ -17529,7 +17529,7 @@
                 <a:ea typeface="Calibri" pitchFamily="34" charset="-122"/>
                 <a:cs typeface="B Nazanin" pitchFamily="34" charset="-120"/>
               </a:rPr>
-              <a:t>اشکال روش کنونی: وقت‌گیر است، به تجربه فرد وابسته است، ثبت دیجیتال ندارد.</a:t>
+              <a:t>روش دستی سه محدودیت دارد: زمان‌بر بودن، وابستگی به تجربه فرد، و نبود ثبت دیجیتال.</a:t>
             </a:r>
             <a:endParaRPr lang="en-US" sz="1600" dirty="0"/>
           </a:p>
@@ -17553,7 +17553,7 @@
                 <a:ea typeface="Calibri" pitchFamily="34" charset="-122"/>
                 <a:cs typeface="B Nazanin" pitchFamily="34" charset="-120"/>
               </a:rPr>
-              <a:t>این پژوهش: همین اندازه‌گیری را از روی یک عکس معمولی خودکار می‌کند.</a:t>
+              <a:t>در پژوهش حاضر، این اندازه‌گیری از روی تصویر معمولی و به صورت خودکار انجام می‌شود.</a:t>
             </a:r>
             <a:endParaRPr lang="en-US" sz="1600" dirty="0"/>
           </a:p>
@@ -17634,7 +17634,7 @@
                 <a:ea typeface="Cambria" pitchFamily="34" charset="-122"/>
                 <a:cs typeface="B Titr" pitchFamily="34" charset="-120"/>
               </a:rPr>
-              <a:t>!</a:t>
+              <a:t>•</a:t>
             </a:r>
             <a:endParaRPr lang="en-US" sz="3600" dirty="0"/>
           </a:p>
@@ -17715,7 +17715,7 @@
                 <a:ea typeface="Calibri" pitchFamily="34" charset="-122"/>
                 <a:cs typeface="B Nazanin" pitchFamily="34" charset="-120"/>
               </a:rPr>
-              <a:t>نسبت‌داده‌شده به مقاومت آنتی‌بیوتیکی در سال ۲۰۱۹</a:t>
+              <a:t>مرگ منتسب به مقاومت آنتی‌بیوتیکی در سال ۲۰۱۹</a:t>
             </a:r>
             <a:endParaRPr lang="en-US" sz="1300" dirty="0"/>
           </a:p>
@@ -17931,7 +17931,7 @@
                 <a:ea typeface="Cambria" pitchFamily="34" charset="-122"/>
                 <a:cs typeface="B Titr" pitchFamily="34" charset="-120"/>
               </a:rPr>
-              <a:t>هدف و پرسش‌های پژوهش</a:t>
+              <a:t>اهداف پژوهش</a:t>
             </a:r>
             <a:endParaRPr lang="en-US" sz="3000" dirty="0"/>
           </a:p>
@@ -18051,7 +18051,7 @@
                 <a:ea typeface="Calibri" pitchFamily="34" charset="-122"/>
                 <a:cs typeface="B Nazanin" pitchFamily="34" charset="-120"/>
               </a:rPr>
-              <a:t>پرسش یکم</a:t>
+              <a:t>هدف یکم</a:t>
             </a:r>
             <a:endParaRPr lang="en-US" sz="1200" dirty="0"/>
           </a:p>
@@ -18093,7 +18093,7 @@
                 <a:ea typeface="Calibri" pitchFamily="34" charset="-122"/>
                 <a:cs typeface="B Nazanin" pitchFamily="34" charset="-120"/>
               </a:rPr>
-              <a:t>آیا می‌توان قطر هاله را از یک عکس معمولی و بدون تجهیزات ویژه اندازه گرفت؟</a:t>
+              <a:t>سنجش امکان اندازه‌گیری خودکار قطر هاله از تصویر معمولی و بدون تجهیزات ویژه.</a:t>
             </a:r>
             <a:endParaRPr lang="en-US" sz="1400" dirty="0"/>
           </a:p>
@@ -18213,7 +18213,7 @@
                 <a:ea typeface="Calibri" pitchFamily="34" charset="-122"/>
                 <a:cs typeface="B Nazanin" pitchFamily="34" charset="-120"/>
               </a:rPr>
-              <a:t>پرسش دوم</a:t>
+              <a:t>هدف دوم</a:t>
             </a:r>
             <a:endParaRPr lang="en-US" sz="1200" dirty="0"/>
           </a:p>
@@ -18255,7 +18255,7 @@
                 <a:ea typeface="Calibri" pitchFamily="34" charset="-122"/>
                 <a:cs typeface="B Nazanin" pitchFamily="34" charset="-120"/>
               </a:rPr>
-              <a:t>دقت این اندازه‌گیری در برابر خوانش کارشناس چقدر است؟</a:t>
+              <a:t>تعیین دقت این اندازه‌گیری در مقایسه با خوانش کارشناس.</a:t>
             </a:r>
             <a:endParaRPr lang="en-US" sz="1400" dirty="0"/>
           </a:p>
@@ -18375,7 +18375,7 @@
                 <a:ea typeface="Calibri" pitchFamily="34" charset="-122"/>
                 <a:cs typeface="B Nazanin" pitchFamily="34" charset="-120"/>
               </a:rPr>
-              <a:t>پرسش سوم</a:t>
+              <a:t>هدف سوم</a:t>
             </a:r>
             <a:endParaRPr lang="en-US" sz="1200" dirty="0"/>
           </a:p>
@@ -18417,7 +18417,7 @@
                 <a:ea typeface="Calibri" pitchFamily="34" charset="-122"/>
                 <a:cs typeface="B Nazanin" pitchFamily="34" charset="-120"/>
               </a:rPr>
-              <a:t>آیا این دقت برای تصمیم بالینی کافی است؟ اگر نیست، مانع کجاست؟</a:t>
+              <a:t>ارزیابی کفایت این دقت برای تصمیم بالینی و شناسایی عامل محدودکننده آن.</a:t>
             </a:r>
             <a:endParaRPr lang="en-US" sz="1400" dirty="0"/>
           </a:p>
@@ -18756,7 +18756,7 @@
                 <a:ea typeface="Calibri" pitchFamily="34" charset="-122"/>
                 <a:cs typeface="B Nazanin" pitchFamily="34" charset="-120"/>
               </a:rPr>
-              <a:t>AntibiogramJ با آستانه‌گذاری کلاسیک، توافق حدود ۸۷ درصد. از نظر فناوری نزدیک‌ترین کار به این پژوهش.</a:t>
+              <a:t>ابزار AntibiogramJ بر پایه آستانه‌گذاری کلاسیک، با توافق گزارش‌شده حدود ۸۷ درصد. از نظر فناوری نزدیک‌ترین کار به پژوهش حاضر است.</a:t>
             </a:r>
             <a:endParaRPr lang="en-US" sz="1250" dirty="0"/>
           </a:p>
@@ -18879,7 +18879,7 @@
                 <a:ea typeface="Calibri" pitchFamily="34" charset="-122"/>
                 <a:cs typeface="B Nazanin" pitchFamily="34" charset="-120"/>
               </a:rPr>
-              <a:t>یک برنامه تلفن همراه، توافق ۹۸ درصد. این دسته از نظر دقت عددی از سامانه حاضر جلوتر است.</a:t>
+              <a:t>یک برنامه تلفن همراه با توافق گزارش‌شده ۹۸ درصد. دقت عددی این دسته از سامانه حاضر بالاتر است.</a:t>
             </a:r>
             <a:endParaRPr lang="en-US" sz="1250" dirty="0"/>
           </a:p>
@@ -19002,7 +19002,7 @@
                 <a:ea typeface="Calibri" pitchFamily="34" charset="-122"/>
                 <a:cs typeface="B Nazanin" pitchFamily="34" charset="-120"/>
               </a:rPr>
-              <a:t>تصویربرداری لکه لیزری، یافتن داروی موثر در کمتر از سه ساعت. به جای بهبود تحلیل، خود تصویربرداری را عوض می‌کند.</a:t>
+              <a:t>تصویربرداری لکه لیزری، با تعیین داروی موثر در کمتر از سه ساعت. تمرکز این دسته بر تغییر سازوکار تصویربرداری است.</a:t>
             </a:r>
             <a:endParaRPr lang="en-US" sz="1250" dirty="0"/>
           </a:p>
@@ -19125,7 +19125,7 @@
                 <a:ea typeface="Calibri" pitchFamily="34" charset="-122"/>
                 <a:cs typeface="B Nazanin" pitchFamily="34" charset="-120"/>
               </a:rPr>
-              <a:t>یک زنجیره کاملاً قطعی، و اندازه‌گیری علتی که خطای باقی‌مانده را می‌سازد.</a:t>
+              <a:t>یک زنجیره پردازش کاملاً قطعی، و اندازه‌گیری کمی عامل خطای باقی‌مانده.</a:t>
             </a:r>
             <a:endParaRPr lang="en-US" sz="1250" dirty="0"/>
           </a:p>
@@ -19503,7 +19503,7 @@
                 <a:ea typeface="Calibri" pitchFamily="34" charset="-122"/>
                 <a:cs typeface="B Nazanin" pitchFamily="34" charset="-120"/>
               </a:rPr>
-              <a:t>مکان و قطر ظرف پتری، و تعیین مقیاس کار</a:t>
+              <a:t>تعیین مکان و قطر ظرف پتری و استخراج مقیاس تصویر</a:t>
             </a:r>
             <a:endParaRPr lang="en-US" sz="1150" dirty="0"/>
           </a:p>
@@ -19685,7 +19685,7 @@
                 <a:ea typeface="Calibri" pitchFamily="34" charset="-122"/>
                 <a:cs typeface="B Nazanin" pitchFamily="34" charset="-120"/>
               </a:rPr>
-              <a:t>ترکیب دو شاخه مستقل؛ قطر شش میلی‌متری استاندارد، مقیاس میلی‌متر را می‌دهد</a:t>
+              <a:t>ترکیب دو شاخه مستقل. قطر استاندارد شش میلی‌متری دیسک، مبنای تبدیل پیکسل به میلی‌متر است</a:t>
             </a:r>
             <a:endParaRPr lang="en-US" sz="1150" dirty="0"/>
           </a:p>
@@ -19867,7 +19867,7 @@
                 <a:ea typeface="Calibri" pitchFamily="34" charset="-122"/>
                 <a:cs typeface="B Nazanin" pitchFamily="34" charset="-120"/>
               </a:rPr>
-              <a:t>سه روش موازی و ترکیب آن‌ها</a:t>
+              <a:t>برآورد مرز با سه روش موازی و ترکیب نتایج آن‌ها</a:t>
             </a:r>
             <a:endParaRPr lang="en-US" sz="1150" dirty="0"/>
           </a:p>
@@ -20049,7 +20049,7 @@
                 <a:ea typeface="Calibri" pitchFamily="34" charset="-122"/>
                 <a:cs typeface="B Nazanin" pitchFamily="34" charset="-120"/>
               </a:rPr>
-              <a:t>سنجش قطر با جدول‌های نقطه شکست EUCAST نسخه ۱۶٫۰</a:t>
+              <a:t>تطبیق قطر با جدول‌های نقطه شکست EUCAST نسخه ۱۶٫۰</a:t>
             </a:r>
             <a:endParaRPr lang="en-US" sz="1150" dirty="0"/>
           </a:p>
@@ -20359,7 +20359,7 @@
                 <a:ea typeface="Calibri" pitchFamily="34" charset="-122"/>
                 <a:cs typeface="B Nazanin" pitchFamily="34" charset="-120"/>
               </a:rPr>
-              <a:t>توافق دسته‌ای — از ۳۱٬۷۵۹ تصمیم شبیه‌سازی‌شده</a:t>
+              <a:t>توافق دسته‌ای، حاصل ۳۱٬۷۵۹ تصمیم شبیه‌سازی‌شده</a:t>
             </a:r>
             <a:endParaRPr lang="en-US" sz="1300" dirty="0"/>
           </a:p>
@@ -21139,7 +21139,7 @@
                 <a:ea typeface="Calibri" pitchFamily="34" charset="-122"/>
                 <a:cs typeface="B Nazanin" pitchFamily="34" charset="-120"/>
               </a:rPr>
-              <a:t>حدود توافق: ۱۲٫۳− تا ۱۱٫۱+ میلی‌متر · میانه خطا ۲٫۱۰ · خطا سی درصد کم شد</a:t>
+              <a:t>حدود توافق: ۱۲٫۳− تا ۱۱٫۱+ میلی‌متر · میانه خطا ۲٫۱۰ میلی‌متر · کاهش سی‌درصدی خطا</a:t>
             </a:r>
             <a:endParaRPr lang="en-US" sz="1400" dirty="0"/>
           </a:p>
@@ -21401,7 +21401,7 @@
                 <a:ea typeface="Calibri" pitchFamily="34" charset="-122"/>
                 <a:cs typeface="B Nazanin" pitchFamily="34" charset="-120"/>
               </a:rPr>
-              <a:t>اندازه‌گیری: روی نیمی از دیسک‌ها، روشنایی داخل هاله تنها ۰٫۳ انحراف معیار فضایی محیط کشت با آن فرق دارد.</a:t>
+              <a:t>اندازه‌گیری: بر روی حدود نیمی از دیسک‌ها، اختلاف روشنایی داخل هاله با محیط کشت تنها ۰٫۳ انحراف معیار فضایی است.</a:t>
             </a:r>
             <a:endParaRPr lang="en-US" sz="1600" dirty="0"/>
           </a:p>
@@ -21425,7 +21425,7 @@
                 <a:ea typeface="Calibri" pitchFamily="34" charset="-122"/>
                 <a:cs typeface="B Nazanin" pitchFamily="34" charset="-120"/>
               </a:rPr>
-              <a:t>کنترل یکم: مرجع داخل هاله در صفر درصد موارد بیرون هاله نیفتاده است.</a:t>
+              <a:t>کنترل یکم: مرجع داخل هاله در صفر درصد موارد خارج از هاله قرار گرفته است.</a:t>
             </a:r>
             <a:endParaRPr lang="en-US" sz="1600" dirty="0"/>
           </a:p>
@@ -21449,7 +21449,7 @@
                 <a:ea typeface="Calibri" pitchFamily="34" charset="-122"/>
                 <a:cs typeface="B Nazanin" pitchFamily="34" charset="-120"/>
               </a:rPr>
-              <a:t>کنترل دوم: با دادن محل درست مرز به الگوریتم، جدایش به ۰٫۲۹ می‌رسد.</a:t>
+              <a:t>کنترل دوم: با در اختیار گذاشتن محل واقعی مرز، جدایش به ۰٫۲۹ کاهش می‌یابد.</a:t>
             </a:r>
             <a:endParaRPr lang="en-US" sz="1600" dirty="0"/>
           </a:p>
@@ -21473,7 +21473,7 @@
                 <a:ea typeface="Calibri" pitchFamily="34" charset="-122"/>
                 <a:cs typeface="B Nazanin" pitchFamily="34" charset="-120"/>
               </a:rPr>
-              <a:t>دو راه استاندارد رد شد: تغییر فضای نوری خطا را به ۷٫۰۰ برد و میانگین‌گیری فضایی ۲٫۶۳ میلی‌متر تاری افزود.</a:t>
+              <a:t>دو راهکار استاندارد آزموده و رد شد: تغییر فضای نوری، خطا را به ۷٫۰۰ میلی‌متر افزایش داد و میانگین‌گیری فضایی، ۲٫۶۳ میلی‌متر تاری به مرز افزود.</a:t>
             </a:r>
             <a:endParaRPr lang="en-US" sz="1600" dirty="0"/>
           </a:p>
@@ -21554,7 +21554,7 @@
                 <a:ea typeface="Cambria" pitchFamily="34" charset="-122"/>
                 <a:cs typeface="B Titr" pitchFamily="34" charset="-120"/>
               </a:rPr>
-              <a:t>!</a:t>
+              <a:t>•</a:t>
             </a:r>
             <a:endParaRPr lang="en-US" sz="4000" dirty="0"/>
           </a:p>
@@ -21635,7 +21635,7 @@
                 <a:ea typeface="Calibri" pitchFamily="34" charset="-122"/>
                 <a:cs typeface="B Nazanin" pitchFamily="34" charset="-120"/>
               </a:rPr>
-              <a:t>این اطلاعات به‌کلی از تصویر حذف نشده، اما هیچ‌یک از روش‌های این پروژه نتوانست در این سطح کنتراست به آن دست یابد.</a:t>
+              <a:t>این اطلاعات به‌طور کامل از تصویر حذف نشده است؛ اما هیچ‌یک از روش‌های پژوهش حاضر در این سطح کنتراست به آن دست نیافت.</a:t>
             </a:r>
             <a:endParaRPr lang="en-US" sz="1300" dirty="0"/>
           </a:p>
